--- a/cursos/recursos/desequilibrios-de-material/02-alfil-contra-caballo-el-caballo-fuerte.pptx
+++ b/cursos/recursos/desequilibrios-de-material/02-alfil-contra-caballo-el-caballo-fuerte.pptx
@@ -7163,7 +7163,7 @@
                 </a:solidFill>
                 <a:latin typeface="Calibri"/>
               </a:rPr>
-              <a:t>Reproducí en el tablero la posición final de Carlsen–Tari después de 33...Be7? y buscá vos mismo la ruta hacia el mate antes de mirar la solución del motor. Después jugá contra el motor la posición de Carlsen–Martinovic con el bando del alfil, tratando de encontrar el momento exacto en que debiste haber activado el rey o cambiado piezas.</a:t>
+              <a:t>Reproducí en el tablero la posición final de Carlsen–Tari después de 33...Ae7? y buscá vos mismo la ruta hacia el mate antes de mirar la solución del motor. Después jugá contra el motor la posición de Carlsen–Martinovic con el bando del alfil, tratando de encontrar el momento exacto en que debiste haber activado el rey o cambiado piezas.</a:t>
             </a:r>
           </a:p>
           <a:p>
@@ -7727,7 +7727,7 @@
                 </a:solidFill>
                 <a:latin typeface="Calibri"/>
               </a:rPr>
-              <a:t>Los dos ejemplos de la lección ilustran ambos extremos del fenómeno. En Carlsen–Martinovic, con peones sólo en un flanco, la posición era objetivamente tablas durante buena parte del análisis, pero el defensor debía encontrar todo el tiempo el equilibrio exacto entre la pasividad y la actividad, mientras Carlsen jugaba a ganar sin ningún riesgo: un ejemplo de cómo la evaluación numérica esconde una enorme asimetría práctica. En Carlsen–Tari, el caballo fuerte contra el alfil malo se convierte en el modelo canónico de este tema: pese al poco material que queda en el tablero, el dominio del caballo alcanza para crear amenazas de mate y para ganar finales por zugzwang, y el único desliz serio de Tari en 25 jugadas (33...Be7?, en vez del salvador 33...Qd7!) fue suficiente para perder sin remedio: la mejor prueba de lo difícil que es jugar con un alfil malo contra un caballo fuerte.</a:t>
+              <a:t>Los dos ejemplos de la lección ilustran ambos extremos del fenómeno. En Carlsen–Martinovic, con peones sólo en un flanco, la posición era objetivamente tablas durante buena parte del análisis, pero el defensor debía encontrar todo el tiempo el equilibrio exacto entre la pasividad y la actividad, mientras Carlsen jugaba a ganar sin ningún riesgo: un ejemplo de cómo la evaluación numérica esconde una enorme asimetría práctica. En Carlsen–Tari, el caballo fuerte contra el alfil malo se convierte en el modelo canónico de este tema: pese al poco material que queda en el tablero, el dominio del caballo alcanza para crear amenazas de mate y para ganar finales por zugzwang, y el único desliz serio de Tari en 25 jugadas (33...Ae7?, en vez del salvador 33...Dd7!) fue suficiente para perder sin remedio: la mejor prueba de lo difícil que es jugar con un alfil malo contra un caballo fuerte.</a:t>
             </a:r>
           </a:p>
         </p:txBody>

--- a/cursos/recursos/desequilibrios-de-material/02-alfil-contra-caballo-el-caballo-fuerte.pptx
+++ b/cursos/recursos/desequilibrios-de-material/02-alfil-contra-caballo-el-caballo-fuerte.pptx
@@ -3476,7 +3476,7 @@
                 </a:solidFill>
                 <a:latin typeface="Calibri"/>
               </a:rPr>
-              <a:t>Pista: Capturar el caballo pierde. Buscá una casilla del rey que haga dos trabajos a la vez.</a:t>
+              <a:t>Pista: Capturar el caballo pierde. Busca una casilla del rey que haga dos trabajos a la vez.</a:t>
             </a:r>
           </a:p>
         </p:txBody>
@@ -4445,7 +4445,7 @@
                 </a:solidFill>
                 <a:latin typeface="Calibri"/>
               </a:rPr>
-              <a:t>Pista: Coronar ahora sería un error. Repetí el mecanismo que funcionó en la jugada 64.</a:t>
+              <a:t>Pista: Coronar ahora sería un error. Repite el mecanismo que funcionó en la jugada 64.</a:t>
             </a:r>
           </a:p>
         </p:txBody>
@@ -4682,7 +4682,7 @@
                 </a:solidFill>
                 <a:latin typeface="Calibri"/>
               </a:rPr>
-              <a:t>•  Como defensor, identificá las casillas y la diagonal que sostienen tu fortaleza y no las abandonés ni siquiera con jugadas de espera que parezcan inocentes.</a:t>
+              <a:t>•  Como defensor, identifica las casillas y la diagonal que sostienen tu fortaleza y no las abandones ni siquiera con jugadas de espera que parezcan inocentes.</a:t>
             </a:r>
           </a:p>
           <a:p>
@@ -5300,7 +5300,7 @@
                 </a:solidFill>
                 <a:latin typeface="Calibri"/>
               </a:rPr>
-              <a:t>Pista: Pensá en cuál de las dos piezas menores negras conviene forzar a recapturar en f6.</a:t>
+              <a:t>Pista: Piensa en cuál de las dos piezas menores negras conviene forzar a recapturar en f6.</a:t>
             </a:r>
           </a:p>
         </p:txBody>
@@ -7020,7 +7020,7 @@
                 </a:solidFill>
                 <a:latin typeface="Calibri"/>
               </a:rPr>
-              <a:t>•  Buscá la ruptura de peones que abra líneas hacia el rey rival justo por el flanco donde su pieza defensiva no puede ayudar.</a:t>
+              <a:t>•  Busca la ruptura de peones que abra líneas hacia el rey rival justo por el flanco donde su pieza defensiva no puede ayudar.</a:t>
             </a:r>
           </a:p>
         </p:txBody>
@@ -7163,7 +7163,7 @@
                 </a:solidFill>
                 <a:latin typeface="Calibri"/>
               </a:rPr>
-              <a:t>Reproducí en el tablero la posición final de Carlsen–Tari después de 33...Ae7? y buscá vos mismo la ruta hacia el mate antes de mirar la solución del motor. Después jugá contra el motor la posición de Carlsen–Martinovic con el bando del alfil, tratando de encontrar el momento exacto en que debiste haber activado el rey o cambiado piezas.</a:t>
+              <a:t>Reproduce en el tablero la posición final de Carlsen–Tari después de 33...Ae7? y busca tú mismo la ruta hacia el mate antes de mirar la solución del motor. Después juega contra el motor la posición de Carlsen–Martinovic con el bando del alfil, tratando de encontrar el momento exacto en que debiste haber activado el rey o cambiado piezas.</a:t>
             </a:r>
           </a:p>
           <a:p>
@@ -7195,7 +7195,7 @@
                 </a:solidFill>
                 <a:latin typeface="Calibri"/>
               </a:rPr>
-              <a:t>En la página del curso podés recorrer cada partida con los comentarios, adivinar las jugadas clave en el tablero y continuar cualquier posición contra el motor (Stockfish). La hoja de ejercicios en PDF reúne los momentos clave de esta lección para resolver sin tablero.</a:t>
+              <a:t>En la página del curso puedes recorrer cada partida con los comentarios, adivinar las jugadas clave en el tablero y continuar cualquier posición contra el motor (Stockfish). La hoja de ejercicios en PDF reúne los momentos clave de esta lección para resolver sin tablero.</a:t>
             </a:r>
           </a:p>
         </p:txBody>
@@ -7234,7 +7234,7 @@
                 </a:solidFill>
                 <a:latin typeface="Calibri"/>
               </a:rPr>
-              <a:t>•  Primero recorré la partida completa leyendo los comentarios.</a:t>
+              <a:t>•  Primero recorre la partida completa leyendo los comentarios.</a:t>
             </a:r>
           </a:p>
           <a:p>
@@ -7250,7 +7250,7 @@
                 </a:solidFill>
                 <a:latin typeface="Calibri"/>
               </a:rPr>
-              <a:t>•  Después hacé el modo "adivinar las jugadas clave" hasta acertar todas.</a:t>
+              <a:t>•  Después haz el modo "adivinar las jugadas clave" hasta acertar todas.</a:t>
             </a:r>
           </a:p>
           <a:p>
@@ -7266,7 +7266,7 @@
                 </a:solidFill>
                 <a:latin typeface="Calibri"/>
               </a:rPr>
-              <a:t>•  Por último respondé el cuestionario y anotá con tus palabras las reglas de la lección.</a:t>
+              <a:t>•  Por último responde el cuestionario y anota con tus palabras las reglas de la lección.</a:t>
             </a:r>
           </a:p>
         </p:txBody>
@@ -7870,7 +7870,7 @@
                 </a:solidFill>
                 <a:latin typeface="Calibri"/>
               </a:rPr>
-              <a:t>•  Antes de valorar alfil contra caballo, fijate si el juego está cerrado o reducido a un solo flanco.</a:t>
+              <a:t>•  Antes de valorar alfil contra caballo, fíjate si el juego está cerrado o reducido a un solo flanco.</a:t>
             </a:r>
           </a:p>
           <a:p>
@@ -7902,7 +7902,7 @@
                 </a:solidFill>
                 <a:latin typeface="Calibri"/>
               </a:rPr>
-              <a:t>•  Fijá los peones rivales en el color del alfil malo para dejarlo sin diagonales ni objetivos.</a:t>
+              <a:t>•  Fija los peones rivales en el color del alfil malo para dejarlo sin diagonales ni objetivos.</a:t>
             </a:r>
           </a:p>
           <a:p>
@@ -7918,7 +7918,7 @@
                 </a:solidFill>
                 <a:latin typeface="Calibri"/>
               </a:rPr>
-              <a:t>•  Buscá el zugzwang: reducile al rival las casillas de espera antes de decidir el ataque final.</a:t>
+              <a:t>•  Busca el zugzwang: redúcele al rival las casillas de espera antes de decidir el ataque final.</a:t>
             </a:r>
           </a:p>
           <a:p>
@@ -7934,7 +7934,7 @@
                 </a:solidFill>
                 <a:latin typeface="Calibri"/>
               </a:rPr>
-              <a:t>•  Si tenés el alfil malo, cambiá piezas menores cuanto antes, antes de que el caballo se instale.</a:t>
+              <a:t>•  Si tienes el alfil malo, cambia piezas menores cuanto antes, antes de que el caballo se instale.</a:t>
             </a:r>
           </a:p>
           <a:p>
@@ -8552,7 +8552,7 @@
                 </a:solidFill>
                 <a:latin typeface="Calibri"/>
               </a:rPr>
-              <a:t>Pista: Pensá en qué jugada obliga a las negras a tomar una decisión difícil en lugar de simplificar.</a:t>
+              <a:t>Pista: Piensa en qué jugada obliga a las negras a tomar una decisión difícil en lugar de simplificar.</a:t>
             </a:r>
           </a:p>
         </p:txBody>

--- a/cursos/recursos/desequilibrios-de-material/02-alfil-contra-caballo-el-caballo-fuerte.pptx
+++ b/cursos/recursos/desequilibrios-de-material/02-alfil-contra-caballo-el-caballo-fuerte.pptx
@@ -3476,7 +3476,7 @@
                 </a:solidFill>
                 <a:latin typeface="Calibri"/>
               </a:rPr>
-              <a:t>Pista: Capturar el caballo pierde. Buscá una casilla del rey que haga dos trabajos a la vez.</a:t>
+              <a:t>Pista: Capturar el caballo pierde. Busca una casilla del rey que haga dos trabajos a la vez.</a:t>
             </a:r>
           </a:p>
         </p:txBody>
@@ -4445,7 +4445,7 @@
                 </a:solidFill>
                 <a:latin typeface="Calibri"/>
               </a:rPr>
-              <a:t>Pista: Coronar ahora sería un error. Repetí el mecanismo que funcionó en la jugada 64.</a:t>
+              <a:t>Pista: Coronar ahora sería un error. Repite el mecanismo que funcionó en la jugada 64.</a:t>
             </a:r>
           </a:p>
         </p:txBody>
@@ -4682,7 +4682,7 @@
                 </a:solidFill>
                 <a:latin typeface="Calibri"/>
               </a:rPr>
-              <a:t>•  Como defensor, identificá las casillas y la diagonal que sostienen tu fortaleza y no las abandonés ni siquiera con jugadas de espera que parezcan inocentes.</a:t>
+              <a:t>•  Como defensor, identifica las casillas y la diagonal que sostienen tu fortaleza y no las abandones ni siquiera con jugadas de espera que parezcan inocentes.</a:t>
             </a:r>
           </a:p>
           <a:p>
@@ -5300,7 +5300,7 @@
                 </a:solidFill>
                 <a:latin typeface="Calibri"/>
               </a:rPr>
-              <a:t>Pista: Pensá en cuál de las dos piezas menores negras conviene forzar a recapturar en f6.</a:t>
+              <a:t>Pista: Piensa en cuál de las dos piezas menores negras conviene forzar a recapturar en f6.</a:t>
             </a:r>
           </a:p>
         </p:txBody>
@@ -7020,7 +7020,7 @@
                 </a:solidFill>
                 <a:latin typeface="Calibri"/>
               </a:rPr>
-              <a:t>•  Buscá la ruptura de peones que abra líneas hacia el rey rival justo por el flanco donde su pieza defensiva no puede ayudar.</a:t>
+              <a:t>•  Busca la ruptura de peones que abra líneas hacia el rey rival justo por el flanco donde su pieza defensiva no puede ayudar.</a:t>
             </a:r>
           </a:p>
         </p:txBody>
@@ -7163,7 +7163,7 @@
                 </a:solidFill>
                 <a:latin typeface="Calibri"/>
               </a:rPr>
-              <a:t>Reproducí en el tablero la posición final de Carlsen–Tari después de 33...Be7? y buscá vos mismo la ruta hacia el mate antes de mirar la solución del motor. Después jugá contra el motor la posición de Carlsen–Martinovic con el bando del alfil, tratando de encontrar el momento exacto en que debiste haber activado el rey o cambiado piezas.</a:t>
+              <a:t>Reproduce en el tablero la posición final de Carlsen–Tari después de 33...Ae7? y busca tú mismo la ruta hacia el mate antes de mirar la solución del motor. Después juega contra el motor la posición de Carlsen–Martinovic con el bando del alfil, tratando de encontrar el momento exacto en que debiste haber activado el rey o cambiado piezas.</a:t>
             </a:r>
           </a:p>
           <a:p>
@@ -7195,7 +7195,7 @@
                 </a:solidFill>
                 <a:latin typeface="Calibri"/>
               </a:rPr>
-              <a:t>En la página del curso podés recorrer cada partida con los comentarios, adivinar las jugadas clave en el tablero y continuar cualquier posición contra el motor (Stockfish). La hoja de ejercicios en PDF reúne los momentos clave de esta lección para resolver sin tablero.</a:t>
+              <a:t>En la página del curso puedes recorrer cada partida con los comentarios, adivinar las jugadas clave en el tablero y continuar cualquier posición contra el motor (Stockfish). La hoja de ejercicios en PDF reúne los momentos clave de esta lección para resolver sin tablero.</a:t>
             </a:r>
           </a:p>
         </p:txBody>
@@ -7234,7 +7234,7 @@
                 </a:solidFill>
                 <a:latin typeface="Calibri"/>
               </a:rPr>
-              <a:t>•  Primero recorré la partida completa leyendo los comentarios.</a:t>
+              <a:t>•  Primero recorre la partida completa leyendo los comentarios.</a:t>
             </a:r>
           </a:p>
           <a:p>
@@ -7250,7 +7250,7 @@
                 </a:solidFill>
                 <a:latin typeface="Calibri"/>
               </a:rPr>
-              <a:t>•  Después hacé el modo "adivinar las jugadas clave" hasta acertar todas.</a:t>
+              <a:t>•  Después haz el modo "adivinar las jugadas clave" hasta acertar todas.</a:t>
             </a:r>
           </a:p>
           <a:p>
@@ -7266,7 +7266,7 @@
                 </a:solidFill>
                 <a:latin typeface="Calibri"/>
               </a:rPr>
-              <a:t>•  Por último respondé el cuestionario y anotá con tus palabras las reglas de la lección.</a:t>
+              <a:t>•  Por último responde el cuestionario y anota con tus palabras las reglas de la lección.</a:t>
             </a:r>
           </a:p>
         </p:txBody>
@@ -7727,7 +7727,7 @@
                 </a:solidFill>
                 <a:latin typeface="Calibri"/>
               </a:rPr>
-              <a:t>Los dos ejemplos de la lección ilustran ambos extremos del fenómeno. En Carlsen–Martinovic, con peones sólo en un flanco, la posición era objetivamente tablas durante buena parte del análisis, pero el defensor debía encontrar todo el tiempo el equilibrio exacto entre la pasividad y la actividad, mientras Carlsen jugaba a ganar sin ningún riesgo: un ejemplo de cómo la evaluación numérica esconde una enorme asimetría práctica. En Carlsen–Tari, el caballo fuerte contra el alfil malo se convierte en el modelo canónico de este tema: pese al poco material que queda en el tablero, el dominio del caballo alcanza para crear amenazas de mate y para ganar finales por zugzwang, y el único desliz serio de Tari en 25 jugadas (33...Be7?, en vez del salvador 33...Qd7!) fue suficiente para perder sin remedio: la mejor prueba de lo difícil que es jugar con un alfil malo contra un caballo fuerte.</a:t>
+              <a:t>Los dos ejemplos de la lección ilustran ambos extremos del fenómeno. En Carlsen–Martinovic, con peones sólo en un flanco, la posición era objetivamente tablas durante buena parte del análisis, pero el defensor debía encontrar todo el tiempo el equilibrio exacto entre la pasividad y la actividad, mientras Carlsen jugaba a ganar sin ningún riesgo: un ejemplo de cómo la evaluación numérica esconde una enorme asimetría práctica. En Carlsen–Tari, el caballo fuerte contra el alfil malo se convierte en el modelo canónico de este tema: pese al poco material que queda en el tablero, el dominio del caballo alcanza para crear amenazas de mate y para ganar finales por zugzwang, y el único desliz serio de Tari en 25 jugadas (33...Ae7?, en vez del salvador 33...Dd7!) fue suficiente para perder sin remedio: la mejor prueba de lo difícil que es jugar con un alfil malo contra un caballo fuerte.</a:t>
             </a:r>
           </a:p>
         </p:txBody>
@@ -7870,7 +7870,7 @@
                 </a:solidFill>
                 <a:latin typeface="Calibri"/>
               </a:rPr>
-              <a:t>•  Antes de valorar alfil contra caballo, fijate si el juego está cerrado o reducido a un solo flanco.</a:t>
+              <a:t>•  Antes de valorar alfil contra caballo, fíjate si el juego está cerrado o reducido a un solo flanco.</a:t>
             </a:r>
           </a:p>
           <a:p>
@@ -7902,7 +7902,7 @@
                 </a:solidFill>
                 <a:latin typeface="Calibri"/>
               </a:rPr>
-              <a:t>•  Fijá los peones rivales en el color del alfil malo para dejarlo sin diagonales ni objetivos.</a:t>
+              <a:t>•  Fija los peones rivales en el color del alfil malo para dejarlo sin diagonales ni objetivos.</a:t>
             </a:r>
           </a:p>
           <a:p>
@@ -7918,7 +7918,7 @@
                 </a:solidFill>
                 <a:latin typeface="Calibri"/>
               </a:rPr>
-              <a:t>•  Buscá el zugzwang: reducile al rival las casillas de espera antes de decidir el ataque final.</a:t>
+              <a:t>•  Busca el zugzwang: redúcele al rival las casillas de espera antes de decidir el ataque final.</a:t>
             </a:r>
           </a:p>
           <a:p>
@@ -7934,7 +7934,7 @@
                 </a:solidFill>
                 <a:latin typeface="Calibri"/>
               </a:rPr>
-              <a:t>•  Si tenés el alfil malo, cambiá piezas menores cuanto antes, antes de que el caballo se instale.</a:t>
+              <a:t>•  Si tienes el alfil malo, cambia piezas menores cuanto antes, antes de que el caballo se instale.</a:t>
             </a:r>
           </a:p>
           <a:p>
@@ -8552,7 +8552,7 @@
                 </a:solidFill>
                 <a:latin typeface="Calibri"/>
               </a:rPr>
-              <a:t>Pista: Pensá en qué jugada obliga a las negras a tomar una decisión difícil en lugar de simplificar.</a:t>
+              <a:t>Pista: Piensa en qué jugada obliga a las negras a tomar una decisión difícil en lugar de simplificar.</a:t>
             </a:r>
           </a:p>
         </p:txBody>
